--- a/lessons/day2-finance/A_Day2_Finance_LLM_Context_updated.pptx
+++ b/lessons/day2-finance/A_Day2_Finance_LLM_Context_updated.pptx
@@ -10142,7 +10142,7 @@
         </p:nvSpPr>
         <p:spPr>
           <a:xfrm>
-            <a:off x="465909" y="568054"/>
+            <a:off x="465909" y="324075"/>
             <a:ext cx="10881360" cy="430887"/>
           </a:xfrm>
           <a:prstGeom prst="rect">
@@ -10167,9 +10167,9 @@
               <a:t>Make sure you sign up at </a:t>
             </a:r>
             <a:r>
-              <a:rPr lang="en-US" sz="2800" b="1" dirty="0" err="1">
-                <a:solidFill>
-                  <a:srgbClr val="1E1E1E"/>
+              <a:rPr lang="en-US" sz="2400" b="1" dirty="0" err="1">
+                <a:solidFill>
+                  <a:srgbClr val="FF0000"/>
                 </a:solidFill>
                 <a:latin typeface="Arial"/>
               </a:rPr>
